--- a/Pre-Defense FedMultimed by team learners.pptx
+++ b/Pre-Defense FedMultimed by team learners.pptx
@@ -7600,6 +7600,92 @@
           <a:p>
             <a:pPr algn="ctr"/>
             <a:endParaRPr sz="2800"/>
+          </a:p>
+        </p:txBody>
+      </p:sp>
+      <p:sp>
+        <p:nvSpPr>
+          <p:cNvPr id="3" name="TextBox 2">
+            <a:extLst>
+              <a:ext uri="{FF2B5EF4-FFF2-40B4-BE49-F238E27FC236}">
+                <a16:creationId xmlns:a16="http://schemas.microsoft.com/office/drawing/2014/main" id="{8F4B86F6-B669-D7B3-28F7-31CCCEC0CE69}"/>
+              </a:ext>
+            </a:extLst>
+          </p:cNvPr>
+          <p:cNvSpPr txBox="1"/>
+          <p:nvPr/>
+        </p:nvSpPr>
+        <p:spPr>
+          <a:xfrm>
+            <a:off x="1402080" y="5357336"/>
+            <a:ext cx="10362895" cy="738664"/>
+          </a:xfrm>
+          <a:prstGeom prst="rect">
+            <a:avLst/>
+          </a:prstGeom>
+          <a:noFill/>
+        </p:spPr>
+        <p:txBody>
+          <a:bodyPr wrap="square">
+            <a:spAutoFit/>
+          </a:bodyPr>
+          <a:lstStyle/>
+          <a:p>
+            <a:pPr>
+              <a:defRPr sz="1019" b="1">
+                <a:solidFill>
+                  <a:srgbClr val="0A2540"/>
+                </a:solidFill>
+              </a:defRPr>
+            </a:pPr>
+            <a:r>
+              <a:rPr sz="1400" dirty="0">
+                <a:latin typeface="+mn-lt"/>
+              </a:rPr>
+              <a:t>• Near-Zero Cross-Modality Error: Only 1 of 7,261 test predictions crossed modalities (0.014% error rate).</a:t>
+            </a:r>
+          </a:p>
+          <a:p>
+            <a:pPr>
+              <a:defRPr sz="1019">
+                <a:solidFill>
+                  <a:srgbClr val="1E293B"/>
+                </a:solidFill>
+              </a:defRPr>
+            </a:pPr>
+            <a:r>
+              <a:rPr sz="1400" dirty="0">
+                <a:latin typeface="+mn-lt"/>
+              </a:rPr>
+              <a:t>• High Diagnostic Discrimination: Overall Macro-AUC of 0.9940 (Ultrasound 1.000, MRI 0.998, CXR 0.981, </a:t>
+            </a:r>
+            <a:r>
+              <a:rPr sz="1400" dirty="0" err="1">
+                <a:latin typeface="+mn-lt"/>
+              </a:rPr>
+              <a:t>Dermoscopy</a:t>
+            </a:r>
+            <a:r>
+              <a:rPr sz="1400" dirty="0">
+                <a:latin typeface="+mn-lt"/>
+              </a:rPr>
+              <a:t> 0.953).</a:t>
+            </a:r>
+          </a:p>
+          <a:p>
+            <a:pPr>
+              <a:defRPr sz="1019">
+                <a:solidFill>
+                  <a:srgbClr val="1E293B"/>
+                </a:solidFill>
+              </a:defRPr>
+            </a:pPr>
+            <a:r>
+              <a:rPr sz="1400" dirty="0">
+                <a:latin typeface="+mn-lt"/>
+              </a:rPr>
+              <a:t>• Clinically Confined Errors: Residual misclassifications strictly occurred within adjacent disease subtypes.</a:t>
+            </a:r>
           </a:p>
         </p:txBody>
       </p:sp>
@@ -13858,7 +13944,7 @@
         <p:spPr>
           <a:xfrm>
             <a:off x="737305" y="4914900"/>
-            <a:ext cx="10677150" cy="1143000"/>
+            <a:ext cx="10677150" cy="952500"/>
           </a:xfrm>
           <a:prstGeom prst="roundRect">
             <a:avLst/>
@@ -13909,8 +13995,8 @@
         </p:nvSpPr>
         <p:spPr>
           <a:xfrm>
-            <a:off x="914400" y="5067300"/>
-            <a:ext cx="10332720" cy="892552"/>
+            <a:off x="914400" y="5022503"/>
+            <a:ext cx="10332720" cy="692497"/>
           </a:xfrm>
           <a:prstGeom prst="rect">
             <a:avLst/>
@@ -13949,7 +14035,7 @@
               <a:rPr lang="en-US" sz="1300" dirty="0">
                 <a:latin typeface="+mn-lt"/>
               </a:rPr>
-              <a:t>The reviewed studies address individual areas such as multimodality, federated Learning, ensemble models, or explainable AI. However, none of them combines all these features with multiple aggregation strategies and leakage-controlled data splitting. </a:t>
+              <a:t>The reviewed studies address individual areas such as multimodality, federated Learning, ensemble models, or explainable AI. However, none of them combines all these features together in a single framework. </a:t>
             </a:r>
             <a:r>
               <a:rPr lang="en-US" sz="1300" dirty="0" err="1">
@@ -14107,10 +14193,10 @@
       </p:sp>
       <p:pic>
         <p:nvPicPr>
-          <p:cNvPr id="3" name="Picture 2" descr="A screenshot of a computer screen&#10;&#10;Description automatically generated">
+          <p:cNvPr id="5" name="Picture 4" descr="A group of rectangular boxes with text&#10;&#10;Description automatically generated with medium confidence">
             <a:extLst>
               <a:ext uri="{FF2B5EF4-FFF2-40B4-BE49-F238E27FC236}">
-                <a16:creationId xmlns:a16="http://schemas.microsoft.com/office/drawing/2014/main" id="{AF1FFB02-2EBE-0130-83A6-185133D98005}"/>
+                <a16:creationId xmlns:a16="http://schemas.microsoft.com/office/drawing/2014/main" id="{D7719D0E-9CEA-5D26-270B-660033B6C43B}"/>
               </a:ext>
             </a:extLst>
           </p:cNvPr>
@@ -14127,8 +14213,8 @@
         </p:blipFill>
         <p:spPr>
           <a:xfrm>
-            <a:off x="1066800" y="990600"/>
-            <a:ext cx="10134600" cy="5201995"/>
+            <a:off x="1066800" y="946150"/>
+            <a:ext cx="10134600" cy="5529263"/>
           </a:xfrm>
           <a:prstGeom prst="rect">
             <a:avLst/>
